--- a/lecons/USA/Economic Geography/06_USA_ECO_L06_Von_Th_nen_s_Theory_of_Agricultural_Land_Use.pptx
+++ b/lecons/USA/Economic Geography/06_USA_ECO_L06_Von_Th_nen_s_Theory_of_Agricultural_Land_Use.pptx
@@ -13599,7 +13599,7 @@
               <a:buNone/>
             </a:pPr>
             <a:r>
-              <a:rPr lang="en-US" sz="4000" b="1" dirty="0">
+              <a:rPr lang="en-US" sz="3200" b="1" dirty="0">
                 <a:solidFill>
                   <a:srgbClr val="111111"/>
                 </a:solidFill>
@@ -13609,7 +13609,7 @@
               </a:rPr>
               <a:t>Topic: Theories of Agricultural Land Use</a:t>
             </a:r>
-            <a:endParaRPr lang="en-US" sz="4000" dirty="0"/>
+            <a:endParaRPr lang="en-US" sz="3200" dirty="0"/>
           </a:p>
           <a:p>
             <a:pPr algn="l" indent="0" marL="0">
@@ -13619,7 +13619,7 @@
               <a:buNone/>
             </a:pPr>
             <a:r>
-              <a:rPr lang="en-US" sz="4000" b="1" dirty="0">
+              <a:rPr lang="en-US" sz="3200" b="1" dirty="0">
                 <a:solidFill>
                   <a:srgbClr val="111111"/>
                 </a:solidFill>
@@ -13629,7 +13629,7 @@
               </a:rPr>
               <a:t>Sub-topic: Theories of Agricultural Land Use</a:t>
             </a:r>
-            <a:endParaRPr lang="en-US" sz="4000" dirty="0"/>
+            <a:endParaRPr lang="en-US" sz="3200" dirty="0"/>
           </a:p>
           <a:p>
             <a:pPr algn="l" indent="0" marL="0">
@@ -13639,7 +13639,7 @@
               <a:buNone/>
             </a:pPr>
             <a:r>
-              <a:rPr lang="en-US" sz="4000" b="1" dirty="0">
+              <a:rPr lang="en-US" sz="3200" b="1" dirty="0">
                 <a:solidFill>
                   <a:srgbClr val="990011"/>
                 </a:solidFill>
@@ -13649,7 +13649,7 @@
               </a:rPr>
               <a:t>Lesson 6: Von Thünen's Theory of Agricultural Land Use</a:t>
             </a:r>
-            <a:endParaRPr lang="en-US" sz="4000" dirty="0"/>
+            <a:endParaRPr lang="en-US" sz="3200" dirty="0"/>
           </a:p>
         </p:txBody>
       </p:sp>
